--- a/pll/Pll.pptx
+++ b/pll/Pll.pptx
@@ -10,6 +10,7 @@
     <p:sldId id="258" r:id="rId4"/>
     <p:sldId id="259" r:id="rId5"/>
     <p:sldId id="260" r:id="rId6"/>
+    <p:sldId id="261" r:id="rId7"/>
   </p:sldIdLst>
   <p:sldSz cx="12192000" cy="6858000"/>
   <p:notesSz cx="6858000" cy="9144000"/>
@@ -108,6 +109,11 @@
       </a:defRPr>
     </a:lvl9pPr>
   </p:defaultTextStyle>
+  <p:extLst>
+    <p:ext uri="{EFAFB233-063F-42B5-8137-9DF3F51BA10A}">
+      <p15:sldGuideLst xmlns:p15="http://schemas.microsoft.com/office/powerpoint/2012/main"/>
+    </p:ext>
+  </p:extLst>
 </p:presentation>
 </file>
 
@@ -3519,7 +3525,7 @@
         </p:blipFill>
         <p:spPr>
           <a:xfrm>
-            <a:off x="630016" y="2054224"/>
+            <a:off x="2375292" y="3429000"/>
             <a:ext cx="7717059" cy="2428875"/>
           </a:xfrm>
           <a:prstGeom prst="rect">
@@ -3527,6 +3533,55 @@
           </a:prstGeom>
         </p:spPr>
       </p:pic>
+      <p:sp>
+        <p:nvSpPr>
+          <p:cNvPr id="3" name="TextBox 2">
+            <a:extLst>
+              <a:ext uri="{FF2B5EF4-FFF2-40B4-BE49-F238E27FC236}">
+                <a16:creationId xmlns:a16="http://schemas.microsoft.com/office/drawing/2014/main" id="{DF8E9DFF-B889-57D6-4B96-E7EBC8994BE7}"/>
+              </a:ext>
+            </a:extLst>
+          </p:cNvPr>
+          <p:cNvSpPr txBox="1"/>
+          <p:nvPr/>
+        </p:nvSpPr>
+        <p:spPr>
+          <a:xfrm>
+            <a:off x="653469" y="1690688"/>
+            <a:ext cx="11160706" cy="954107"/>
+          </a:xfrm>
+          <a:prstGeom prst="rect">
+            <a:avLst/>
+          </a:prstGeom>
+          <a:noFill/>
+        </p:spPr>
+        <p:txBody>
+          <a:bodyPr wrap="square" rtlCol="0">
+            <a:spAutoFit/>
+          </a:bodyPr>
+          <a:lstStyle/>
+          <a:p>
+            <a:pPr marL="285750" indent="-285750">
+              <a:buFontTx/>
+              <a:buChar char="-"/>
+            </a:pPr>
+            <a:r>
+              <a:rPr lang="en-US" sz="2800" dirty="0"/>
+              <a:t>Compares the phase of two signals (VCO output and reference signal)</a:t>
+            </a:r>
+          </a:p>
+          <a:p>
+            <a:pPr marL="285750" indent="-285750">
+              <a:buFontTx/>
+              <a:buChar char="-"/>
+            </a:pPr>
+            <a:r>
+              <a:rPr lang="en-US" sz="2800" dirty="0"/>
+              <a:t>Outputs error signal (linearly increases with phase difference)</a:t>
+            </a:r>
+          </a:p>
+        </p:txBody>
+      </p:sp>
     </p:spTree>
     <p:extLst>
       <p:ext uri="{BB962C8B-B14F-4D97-AF65-F5344CB8AC3E}">
@@ -3607,7 +3662,7 @@
         </p:blipFill>
         <p:spPr>
           <a:xfrm>
-            <a:off x="850031" y="2662237"/>
+            <a:off x="4555256" y="1404937"/>
             <a:ext cx="6798544" cy="3357563"/>
           </a:xfrm>
           <a:prstGeom prst="rect">
@@ -3615,6 +3670,47 @@
           </a:prstGeom>
         </p:spPr>
       </p:pic>
+      <p:sp>
+        <p:nvSpPr>
+          <p:cNvPr id="3" name="TextBox 2">
+            <a:extLst>
+              <a:ext uri="{FF2B5EF4-FFF2-40B4-BE49-F238E27FC236}">
+                <a16:creationId xmlns:a16="http://schemas.microsoft.com/office/drawing/2014/main" id="{388EE0E5-6FD7-FF23-2E48-48F9C165715E}"/>
+              </a:ext>
+            </a:extLst>
+          </p:cNvPr>
+          <p:cNvSpPr txBox="1"/>
+          <p:nvPr/>
+        </p:nvSpPr>
+        <p:spPr>
+          <a:xfrm>
+            <a:off x="1054100" y="5003799"/>
+            <a:ext cx="10299700" cy="830997"/>
+          </a:xfrm>
+          <a:prstGeom prst="rect">
+            <a:avLst/>
+          </a:prstGeom>
+          <a:noFill/>
+        </p:spPr>
+        <p:txBody>
+          <a:bodyPr wrap="square" rtlCol="0">
+            <a:spAutoFit/>
+          </a:bodyPr>
+          <a:lstStyle/>
+          <a:p>
+            <a:r>
+              <a:rPr lang="en-US" sz="2400" dirty="0"/>
+              <a:t>Smooths error signal (removes high-frequency variations and noise)</a:t>
+            </a:r>
+          </a:p>
+          <a:p>
+            <a:r>
+              <a:rPr lang="en-US" sz="2400" dirty="0"/>
+              <a:t>Affects how stability and sensitivity of PLL</a:t>
+            </a:r>
+          </a:p>
+        </p:txBody>
+      </p:sp>
     </p:spTree>
     <p:extLst>
       <p:ext uri="{BB962C8B-B14F-4D97-AF65-F5344CB8AC3E}">
@@ -3668,7 +3764,7 @@
           <a:p>
             <a:r>
               <a:rPr lang="en-US" dirty="0"/>
-              <a:t>VCO</a:t>
+              <a:t>VCO (Voltage Controlled Oscillator)</a:t>
             </a:r>
           </a:p>
         </p:txBody>
@@ -3695,8 +3791,226 @@
         </p:blipFill>
         <p:spPr>
           <a:xfrm>
-            <a:off x="1106811" y="2809523"/>
+            <a:off x="3519811" y="3510847"/>
             <a:ext cx="8236767" cy="2982028"/>
+          </a:xfrm>
+          <a:prstGeom prst="rect">
+            <a:avLst/>
+          </a:prstGeom>
+        </p:spPr>
+      </p:pic>
+      <p:sp>
+        <p:nvSpPr>
+          <p:cNvPr id="3" name="TextBox 2">
+            <a:extLst>
+              <a:ext uri="{FF2B5EF4-FFF2-40B4-BE49-F238E27FC236}">
+                <a16:creationId xmlns:a16="http://schemas.microsoft.com/office/drawing/2014/main" id="{1F0ECBF4-40E5-E9B9-CF22-C4E66E25D1F2}"/>
+              </a:ext>
+            </a:extLst>
+          </p:cNvPr>
+          <p:cNvSpPr txBox="1"/>
+          <p:nvPr/>
+        </p:nvSpPr>
+        <p:spPr>
+          <a:xfrm>
+            <a:off x="584200" y="1904999"/>
+            <a:ext cx="11353800" cy="1815882"/>
+          </a:xfrm>
+          <a:prstGeom prst="rect">
+            <a:avLst/>
+          </a:prstGeom>
+          <a:noFill/>
+        </p:spPr>
+        <p:txBody>
+          <a:bodyPr wrap="square" rtlCol="0">
+            <a:spAutoFit/>
+          </a:bodyPr>
+          <a:lstStyle/>
+          <a:p>
+            <a:pPr marL="457200" indent="-457200">
+              <a:buFontTx/>
+              <a:buChar char="-"/>
+            </a:pPr>
+            <a:r>
+              <a:rPr lang="en-US" sz="2800" dirty="0"/>
+              <a:t>Generates output signal whose frequency depends on a control voltage</a:t>
+            </a:r>
+          </a:p>
+          <a:p>
+            <a:pPr marL="914400" lvl="1" indent="-457200">
+              <a:buFontTx/>
+              <a:buChar char="-"/>
+            </a:pPr>
+            <a:r>
+              <a:rPr lang="en-US" sz="2800" dirty="0"/>
+              <a:t>High </a:t>
+            </a:r>
+            <a:r>
+              <a:rPr lang="en-US" sz="2800" dirty="0" err="1"/>
+              <a:t>V_c</a:t>
+            </a:r>
+            <a:r>
+              <a:rPr lang="en-US" sz="2800" dirty="0"/>
+              <a:t> -&gt; higher </a:t>
+            </a:r>
+            <a:r>
+              <a:rPr lang="en-US" sz="2800" dirty="0" err="1"/>
+              <a:t>f_out</a:t>
+            </a:r>
+            <a:endParaRPr lang="en-US" sz="2800" dirty="0"/>
+          </a:p>
+          <a:p>
+            <a:r>
+              <a:rPr lang="en-US" sz="2800" dirty="0"/>
+              <a:t>	</a:t>
+            </a:r>
+          </a:p>
+        </p:txBody>
+      </p:sp>
+    </p:spTree>
+    <p:extLst>
+      <p:ext uri="{BB962C8B-B14F-4D97-AF65-F5344CB8AC3E}">
+        <p14:creationId xmlns:p14="http://schemas.microsoft.com/office/powerpoint/2010/main" val="4057574050"/>
+      </p:ext>
+    </p:extLst>
+  </p:cSld>
+  <p:clrMapOvr>
+    <a:masterClrMapping/>
+  </p:clrMapOvr>
+</p:sld>
+</file>
+
+<file path=ppt/slides/slide6.xml><?xml version="1.0" encoding="utf-8"?>
+<p:sld xmlns:a="http://schemas.openxmlformats.org/drawingml/2006/main" xmlns:r="http://schemas.openxmlformats.org/officeDocument/2006/relationships" xmlns:p="http://schemas.openxmlformats.org/presentationml/2006/main">
+  <p:cSld>
+    <p:spTree>
+      <p:nvGrpSpPr>
+        <p:cNvPr id="1" name=""/>
+        <p:cNvGrpSpPr/>
+        <p:nvPr/>
+      </p:nvGrpSpPr>
+      <p:grpSpPr>
+        <a:xfrm>
+          <a:off x="0" y="0"/>
+          <a:ext cx="0" cy="0"/>
+          <a:chOff x="0" y="0"/>
+          <a:chExt cx="0" cy="0"/>
+        </a:xfrm>
+      </p:grpSpPr>
+      <p:sp>
+        <p:nvSpPr>
+          <p:cNvPr id="2" name="Title 1">
+            <a:extLst>
+              <a:ext uri="{FF2B5EF4-FFF2-40B4-BE49-F238E27FC236}">
+                <a16:creationId xmlns:a16="http://schemas.microsoft.com/office/drawing/2014/main" id="{12E6AB46-3595-57B3-DC01-6874C79E21C8}"/>
+              </a:ext>
+            </a:extLst>
+          </p:cNvPr>
+          <p:cNvSpPr>
+            <a:spLocks noGrp="1"/>
+          </p:cNvSpPr>
+          <p:nvPr>
+            <p:ph type="title"/>
+          </p:nvPr>
+        </p:nvSpPr>
+        <p:spPr/>
+        <p:txBody>
+          <a:bodyPr/>
+          <a:lstStyle/>
+          <a:p>
+            <a:r>
+              <a:rPr lang="en-US" dirty="0"/>
+              <a:t>Feedback</a:t>
+            </a:r>
+          </a:p>
+        </p:txBody>
+      </p:sp>
+      <p:sp>
+        <p:nvSpPr>
+          <p:cNvPr id="3" name="Content Placeholder 2">
+            <a:extLst>
+              <a:ext uri="{FF2B5EF4-FFF2-40B4-BE49-F238E27FC236}">
+                <a16:creationId xmlns:a16="http://schemas.microsoft.com/office/drawing/2014/main" id="{034F86F5-3FFB-70CB-B923-D7B97B24D3E3}"/>
+              </a:ext>
+            </a:extLst>
+          </p:cNvPr>
+          <p:cNvSpPr>
+            <a:spLocks noGrp="1"/>
+          </p:cNvSpPr>
+          <p:nvPr>
+            <p:ph idx="1"/>
+          </p:nvPr>
+        </p:nvSpPr>
+        <p:spPr/>
+        <p:txBody>
+          <a:bodyPr/>
+          <a:lstStyle/>
+          <a:p>
+            <a:pPr>
+              <a:buFontTx/>
+              <a:buChar char="-"/>
+            </a:pPr>
+            <a:r>
+              <a:rPr lang="en-US" dirty="0"/>
+              <a:t>Feeds VCO output into phase detector </a:t>
+            </a:r>
+          </a:p>
+          <a:p>
+            <a:pPr lvl="1">
+              <a:buFontTx/>
+              <a:buChar char="-"/>
+            </a:pPr>
+            <a:r>
+              <a:rPr lang="en-US" dirty="0"/>
+              <a:t>Change in phase creates error signal that adjusts VCO output to recorrect</a:t>
+            </a:r>
+          </a:p>
+          <a:p>
+            <a:pPr>
+              <a:buFontTx/>
+              <a:buChar char="-"/>
+            </a:pPr>
+            <a:r>
+              <a:rPr lang="en-US" dirty="0"/>
+              <a:t>Frequency divider allows PLL to compare high-f output with low-f reference </a:t>
+            </a:r>
+          </a:p>
+          <a:p>
+            <a:pPr lvl="1">
+              <a:buFontTx/>
+              <a:buChar char="-"/>
+            </a:pPr>
+            <a:r>
+              <a:rPr lang="en-US" dirty="0"/>
+              <a:t>Divides/multiplies VCO output by digitally programmed integer</a:t>
+            </a:r>
+          </a:p>
+        </p:txBody>
+      </p:sp>
+      <p:pic>
+        <p:nvPicPr>
+          <p:cNvPr id="4" name="Picture 3" descr="Phase-Locked Loop (PLL) Fundamentals | Analog Devices">
+            <a:extLst>
+              <a:ext uri="{FF2B5EF4-FFF2-40B4-BE49-F238E27FC236}">
+                <a16:creationId xmlns:a16="http://schemas.microsoft.com/office/drawing/2014/main" id="{03617409-056D-A513-4ED9-F4D9DFBA27DA}"/>
+              </a:ext>
+            </a:extLst>
+          </p:cNvPr>
+          <p:cNvPicPr>
+            <a:picLocks noChangeAspect="1"/>
+          </p:cNvPicPr>
+          <p:nvPr/>
+        </p:nvPicPr>
+        <p:blipFill>
+          <a:blip r:embed="rId2"/>
+          <a:stretch>
+            <a:fillRect/>
+          </a:stretch>
+        </p:blipFill>
+        <p:spPr>
+          <a:xfrm>
+            <a:off x="5401808" y="4178300"/>
+            <a:ext cx="6447292" cy="2543175"/>
           </a:xfrm>
           <a:prstGeom prst="rect">
             <a:avLst/>
@@ -3706,7 +4020,7 @@
     </p:spTree>
     <p:extLst>
       <p:ext uri="{BB962C8B-B14F-4D97-AF65-F5344CB8AC3E}">
-        <p14:creationId xmlns:p14="http://schemas.microsoft.com/office/powerpoint/2010/main" val="4057574050"/>
+        <p14:creationId xmlns:p14="http://schemas.microsoft.com/office/powerpoint/2010/main" val="3089670300"/>
       </p:ext>
     </p:extLst>
   </p:cSld>
